--- a/open-research-tools/quarto/quarto-slides.pptx
+++ b/open-research-tools/quarto/quarto-slides.pptx
@@ -25775,7 +25775,7 @@
             </a:r>
             <a:r>
               <a:rPr/>
-              <a:t> (CC-BY-SA-4.0 ). Code snippets are dedicated to the public domain and licensed under a </a:t>
+              <a:t> (CC-BY-SA-4.0). Code snippets are dedicated to the public domain and licensed under a </a:t>
             </a:r>
             <a:r>
               <a:rPr>
@@ -25798,7 +25798,7 @@
             </a:r>
             <a:r>
               <a:rPr i="1"/>
-              <a:t>Introduction to literate programming with Quarto</a:t>
+              <a:t>Introduction to Quarto</a:t>
             </a:r>
             <a:r>
               <a:rPr/>

--- a/open-research-tools/quarto/quarto-slides.pptx
+++ b/open-research-tools/quarto/quarto-slides.pptx
@@ -12855,7 +12855,7 @@
             </a:pPr>
             <a:r>
               <a:rPr/>
-              <a:t>30/09/2026</a:t>
+              <a:t>01/10/2026</a:t>
             </a:r>
           </a:p>
         </p:txBody>

--- a/open-research-tools/quarto/quarto-slides.pptx
+++ b/open-research-tools/quarto/quarto-slides.pptx
@@ -12855,7 +12855,7 @@
             </a:pPr>
             <a:r>
               <a:rPr/>
-              <a:t>01/10/2026</a:t>
+              <a:t>05/10/2026</a:t>
             </a:r>
           </a:p>
         </p:txBody>

--- a/open-research-tools/quarto/quarto-slides.pptx
+++ b/open-research-tools/quarto/quarto-slides.pptx
@@ -12855,7 +12855,7 @@
             </a:pPr>
             <a:r>
               <a:rPr/>
-              <a:t>05/10/2026</a:t>
+              <a:t>08/10/2026</a:t>
             </a:r>
           </a:p>
         </p:txBody>

--- a/open-research-tools/quarto/quarto-slides.pptx
+++ b/open-research-tools/quarto/quarto-slides.pptx
@@ -12855,7 +12855,7 @@
             </a:pPr>
             <a:r>
               <a:rPr/>
-              <a:t>08/10/2026</a:t>
+              <a:t>12/10/2026</a:t>
             </a:r>
           </a:p>
         </p:txBody>

--- a/open-research-tools/quarto/quarto-slides.pptx
+++ b/open-research-tools/quarto/quarto-slides.pptx
@@ -12855,7 +12855,7 @@
             </a:pPr>
             <a:r>
               <a:rPr/>
-              <a:t>12/10/2026</a:t>
+              <a:t>13/10/2026</a:t>
             </a:r>
           </a:p>
         </p:txBody>

--- a/open-research-tools/quarto/quarto-slides.pptx
+++ b/open-research-tools/quarto/quarto-slides.pptx
@@ -12855,7 +12855,7 @@
             </a:pPr>
             <a:r>
               <a:rPr/>
-              <a:t>13/10/2026</a:t>
+              <a:t>14/10/2026</a:t>
             </a:r>
           </a:p>
         </p:txBody>

--- a/open-research-tools/quarto/quarto-slides.pptx
+++ b/open-research-tools/quarto/quarto-slides.pptx
@@ -12855,7 +12855,7 @@
             </a:pPr>
             <a:r>
               <a:rPr/>
-              <a:t>14/10/2026</a:t>
+              <a:t>19/10/2026</a:t>
             </a:r>
           </a:p>
         </p:txBody>

--- a/open-research-tools/quarto/quarto-slides.pptx
+++ b/open-research-tools/quarto/quarto-slides.pptx
@@ -25617,11 +25617,34 @@
             </a:r>
             <a:r>
               <a:rPr/>
+              <a:t>: Schönbrodt, Felix (</a:t>
+            </a:r>
+            <a:r>
+              <a:rPr>
+                <a:hlinkClick r:id="rId3"/>
+              </a:rPr>
+              <a:t>0000-0002-8282-3910</a:t>
+            </a:r>
+            <a:r>
+              <a:rPr/>
+              <a:t>)</a:t>
+            </a:r>
+          </a:p>
+          <a:p>
+            <a:pPr lvl="0" indent="0" marL="0">
+              <a:buNone/>
+            </a:pPr>
+            <a:r>
+              <a:rPr b="1"/>
+              <a:t>Reviewer</a:t>
+            </a:r>
+            <a:r>
+              <a:rPr/>
               <a:t>: von Grebmer zu Wolfsthurn, Sarah ( </a:t>
             </a:r>
             <a:r>
               <a:rPr>
-                <a:hlinkClick r:id="rId3"/>
+                <a:hlinkClick r:id="rId4"/>
               </a:rPr>
               <a:t>0000-0002-6413-3895</a:t>
             </a:r>
@@ -25636,34 +25659,11 @@
             </a:pPr>
             <a:r>
               <a:rPr b="1"/>
-              <a:t>Reviewer</a:t>
-            </a:r>
-            <a:r>
-              <a:rPr/>
-              <a:t>: Schönbrodt, Felix (</a:t>
-            </a:r>
-            <a:r>
-              <a:rPr>
-                <a:hlinkClick r:id="rId4"/>
-              </a:rPr>
-              <a:t>0000-0002-8282-3910</a:t>
-            </a:r>
-            <a:r>
-              <a:rPr/>
-              <a:t>)</a:t>
-            </a:r>
-          </a:p>
-          <a:p>
-            <a:pPr lvl="0" indent="0" marL="0">
-              <a:buNone/>
-            </a:pPr>
-            <a:r>
-              <a:rPr b="1"/>
               <a:t>Consultant</a:t>
             </a:r>
             <a:r>
               <a:rPr/>
-              <a:t>: Ihle, Malika (</a:t>
+              <a:t>: Ihle, Malika ( </a:t>
             </a:r>
             <a:r>
               <a:rPr>

--- a/open-research-tools/quarto/quarto-slides.pptx
+++ b/open-research-tools/quarto/quarto-slides.pptx
@@ -12855,7 +12855,7 @@
             </a:pPr>
             <a:r>
               <a:rPr/>
-              <a:t>19/10/2026</a:t>
+              <a:t>22/10/2026</a:t>
             </a:r>
           </a:p>
         </p:txBody>

--- a/open-research-tools/quarto/quarto-slides.pptx
+++ b/open-research-tools/quarto/quarto-slides.pptx
@@ -12855,7 +12855,7 @@
             </a:pPr>
             <a:r>
               <a:rPr/>
-              <a:t>22/10/2026</a:t>
+              <a:t>26/10/2026</a:t>
             </a:r>
           </a:p>
         </p:txBody>

--- a/open-research-tools/quarto/quarto-slides.pptx
+++ b/open-research-tools/quarto/quarto-slides.pptx
@@ -12855,7 +12855,7 @@
             </a:pPr>
             <a:r>
               <a:rPr/>
-              <a:t>26/10/2026</a:t>
+              <a:t>29/10/2026</a:t>
             </a:r>
           </a:p>
         </p:txBody>
